--- a/m8/diapositivos/sessao-04-m8-f05.pptx
+++ b/m8/diapositivos/sessao-04-m8-f05.pptx
@@ -2624,7 +2624,87 @@
                 <a:ea typeface="Georgia" pitchFamily="34" charset="-122"/>
                 <a:cs typeface="Georgia" pitchFamily="34" charset="-120"/>
               </a:rPr>
-              <a:t>Ana Luísa Amaral, «Prece no Mediterrâneo», Ágora (Assírio &amp; Alvim, 2019); Seara Nova, n.º 1760.</a:t>
+              <a:t>Ana Luísa Amaral, «Prece no Mediterrâneo», </a:t>
+            </a:r>
+            <a:pPr indent="0" marL="0">
+              <a:lnSpc>
+                <a:spcPct val="110000"/>
+              </a:lnSpc>
+              <a:spcAft>
+                <a:spcPts val="1400"/>
+              </a:spcAft>
+              <a:buNone/>
+            </a:pPr>
+            <a:r>
+              <a:rPr lang="en-US" sz="2200" i="1" dirty="0">
+                <a:solidFill>
+                  <a:srgbClr val="F2F0EA"/>
+                </a:solidFill>
+                <a:latin typeface="Georgia" pitchFamily="34" charset="0"/>
+                <a:ea typeface="Georgia" pitchFamily="34" charset="-122"/>
+                <a:cs typeface="Georgia" pitchFamily="34" charset="-120"/>
+              </a:rPr>
+              <a:t>Ágora</a:t>
+            </a:r>
+            <a:pPr indent="0" marL="0">
+              <a:lnSpc>
+                <a:spcPct val="110000"/>
+              </a:lnSpc>
+              <a:spcAft>
+                <a:spcPts val="1400"/>
+              </a:spcAft>
+              <a:buNone/>
+            </a:pPr>
+            <a:r>
+              <a:rPr lang="en-US" sz="2200" dirty="0">
+                <a:solidFill>
+                  <a:srgbClr val="F2F0EA"/>
+                </a:solidFill>
+                <a:latin typeface="Georgia" pitchFamily="34" charset="0"/>
+                <a:ea typeface="Georgia" pitchFamily="34" charset="-122"/>
+                <a:cs typeface="Georgia" pitchFamily="34" charset="-120"/>
+              </a:rPr>
+              <a:t> (Assírio &amp; Alvim, 2019); </a:t>
+            </a:r>
+            <a:pPr indent="0" marL="0">
+              <a:lnSpc>
+                <a:spcPct val="110000"/>
+              </a:lnSpc>
+              <a:spcAft>
+                <a:spcPts val="1400"/>
+              </a:spcAft>
+              <a:buNone/>
+            </a:pPr>
+            <a:r>
+              <a:rPr lang="en-US" sz="2200" i="1" dirty="0">
+                <a:solidFill>
+                  <a:srgbClr val="F2F0EA"/>
+                </a:solidFill>
+                <a:latin typeface="Georgia" pitchFamily="34" charset="0"/>
+                <a:ea typeface="Georgia" pitchFamily="34" charset="-122"/>
+                <a:cs typeface="Georgia" pitchFamily="34" charset="-120"/>
+              </a:rPr>
+              <a:t>Seara Nova</a:t>
+            </a:r>
+            <a:pPr indent="0" marL="0">
+              <a:lnSpc>
+                <a:spcPct val="110000"/>
+              </a:lnSpc>
+              <a:spcAft>
+                <a:spcPts val="1400"/>
+              </a:spcAft>
+              <a:buNone/>
+            </a:pPr>
+            <a:r>
+              <a:rPr lang="en-US" sz="2200" dirty="0">
+                <a:solidFill>
+                  <a:srgbClr val="F2F0EA"/>
+                </a:solidFill>
+                <a:latin typeface="Georgia" pitchFamily="34" charset="0"/>
+                <a:ea typeface="Georgia" pitchFamily="34" charset="-122"/>
+                <a:cs typeface="Georgia" pitchFamily="34" charset="-120"/>
+              </a:rPr>
+              <a:t>, n.º 1760.</a:t>
             </a:r>
             <a:endParaRPr lang="en-US" sz="2200" dirty="0"/>
           </a:p>
@@ -3031,7 +3111,41 @@
                 <a:ea typeface="Arial" pitchFamily="34" charset="-122"/>
                 <a:cs typeface="Arial" pitchFamily="34" charset="-120"/>
               </a:rPr>
-              <a:t>Ana Luísa Amaral (Lisboa, 1956 – Porto, 2022) foi poeta e tradutora e ensinou na Faculdade de Letras do Porto; lês «Prece no Mediterrâneo», do livro Ágora.</a:t>
+              <a:t>Ana Luísa Amaral (Lisboa, 1956 – Porto, 2022) foi poeta e tradutora e ensinou na Faculdade de Letras do Porto; lês «Prece no Mediterrâneo», do livro </a:t>
+            </a:r>
+            <a:pPr indent="0" marL="0">
+              <a:lnSpc>
+                <a:spcPct val="105000"/>
+              </a:lnSpc>
+              <a:buNone/>
+            </a:pPr>
+            <a:r>
+              <a:rPr lang="en-US" sz="2200" i="1" dirty="0">
+                <a:solidFill>
+                  <a:srgbClr val="F2F0EA"/>
+                </a:solidFill>
+                <a:latin typeface="Arial" pitchFamily="34" charset="0"/>
+                <a:ea typeface="Arial" pitchFamily="34" charset="-122"/>
+                <a:cs typeface="Arial" pitchFamily="34" charset="-120"/>
+              </a:rPr>
+              <a:t>Ágora</a:t>
+            </a:r>
+            <a:pPr indent="0" marL="0">
+              <a:lnSpc>
+                <a:spcPct val="105000"/>
+              </a:lnSpc>
+              <a:buNone/>
+            </a:pPr>
+            <a:r>
+              <a:rPr lang="en-US" sz="2200" dirty="0">
+                <a:solidFill>
+                  <a:srgbClr val="F2F0EA"/>
+                </a:solidFill>
+                <a:latin typeface="Arial" pitchFamily="34" charset="0"/>
+                <a:ea typeface="Arial" pitchFamily="34" charset="-122"/>
+                <a:cs typeface="Arial" pitchFamily="34" charset="-120"/>
+              </a:rPr>
+              <a:t>.</a:t>
             </a:r>
             <a:endParaRPr lang="en-US" sz="2200" dirty="0"/>
           </a:p>
